--- a/2026dsa_team10.pptx
+++ b/2026dsa_team10.pptx
@@ -117,12 +117,12 @@
   <pc:docChgLst>
     <pc:chgData name="Amit Godara" userId="44d962cb-8b94-4622-9c1c-c7e2903e05cb" providerId="ADAL" clId="{4C863A64-E2DE-4D13-A2EB-2DB6506242C0}"/>
     <pc:docChg chg="modSld">
-      <pc:chgData name="Amit Godara" userId="44d962cb-8b94-4622-9c1c-c7e2903e05cb" providerId="ADAL" clId="{4C863A64-E2DE-4D13-A2EB-2DB6506242C0}" dt="2026-04-14T15:00:34.082" v="37" actId="1076"/>
+      <pc:chgData name="Amit Godara" userId="44d962cb-8b94-4622-9c1c-c7e2903e05cb" providerId="ADAL" clId="{4C863A64-E2DE-4D13-A2EB-2DB6506242C0}" dt="2026-04-17T12:52:48.940" v="39" actId="6549"/>
       <pc:docMkLst>
         <pc:docMk/>
       </pc:docMkLst>
       <pc:sldChg chg="modSp mod">
-        <pc:chgData name="Amit Godara" userId="44d962cb-8b94-4622-9c1c-c7e2903e05cb" providerId="ADAL" clId="{4C863A64-E2DE-4D13-A2EB-2DB6506242C0}" dt="2026-04-14T15:00:34.082" v="37" actId="1076"/>
+        <pc:chgData name="Amit Godara" userId="44d962cb-8b94-4622-9c1c-c7e2903e05cb" providerId="ADAL" clId="{4C863A64-E2DE-4D13-A2EB-2DB6506242C0}" dt="2026-04-17T12:52:48.940" v="39" actId="6549"/>
         <pc:sldMkLst>
           <pc:docMk/>
           <pc:sldMk cId="2610447289" sldId="256"/>
@@ -136,7 +136,7 @@
           </ac:spMkLst>
         </pc:spChg>
         <pc:graphicFrameChg chg="modGraphic">
-          <ac:chgData name="Amit Godara" userId="44d962cb-8b94-4622-9c1c-c7e2903e05cb" providerId="ADAL" clId="{4C863A64-E2DE-4D13-A2EB-2DB6506242C0}" dt="2026-04-14T14:59:41.149" v="18" actId="20577"/>
+          <ac:chgData name="Amit Godara" userId="44d962cb-8b94-4622-9c1c-c7e2903e05cb" providerId="ADAL" clId="{4C863A64-E2DE-4D13-A2EB-2DB6506242C0}" dt="2026-04-17T12:52:48.940" v="39" actId="6549"/>
           <ac:graphicFrameMkLst>
             <pc:docMk/>
             <pc:sldMk cId="2610447289" sldId="256"/>
@@ -296,7 +296,7 @@
           <a:p>
             <a:fld id="{854E60CA-E60B-3C4A-A6C2-C45FCFAB7068}" type="datetimeFigureOut">
               <a:rPr lang="en-US" smtClean="0"/>
-              <a:t>4/14/2026</a:t>
+              <a:t>4/17/2026</a:t>
             </a:fld>
             <a:endParaRPr lang="en-US"/>
           </a:p>
@@ -494,7 +494,7 @@
           <a:p>
             <a:fld id="{854E60CA-E60B-3C4A-A6C2-C45FCFAB7068}" type="datetimeFigureOut">
               <a:rPr lang="en-US" smtClean="0"/>
-              <a:t>4/14/2026</a:t>
+              <a:t>4/17/2026</a:t>
             </a:fld>
             <a:endParaRPr lang="en-US"/>
           </a:p>
@@ -702,7 +702,7 @@
           <a:p>
             <a:fld id="{854E60CA-E60B-3C4A-A6C2-C45FCFAB7068}" type="datetimeFigureOut">
               <a:rPr lang="en-US" smtClean="0"/>
-              <a:t>4/14/2026</a:t>
+              <a:t>4/17/2026</a:t>
             </a:fld>
             <a:endParaRPr lang="en-US"/>
           </a:p>
@@ -900,7 +900,7 @@
           <a:p>
             <a:fld id="{854E60CA-E60B-3C4A-A6C2-C45FCFAB7068}" type="datetimeFigureOut">
               <a:rPr lang="en-US" smtClean="0"/>
-              <a:t>4/14/2026</a:t>
+              <a:t>4/17/2026</a:t>
             </a:fld>
             <a:endParaRPr lang="en-US"/>
           </a:p>
@@ -1175,7 +1175,7 @@
           <a:p>
             <a:fld id="{854E60CA-E60B-3C4A-A6C2-C45FCFAB7068}" type="datetimeFigureOut">
               <a:rPr lang="en-US" smtClean="0"/>
-              <a:t>4/14/2026</a:t>
+              <a:t>4/17/2026</a:t>
             </a:fld>
             <a:endParaRPr lang="en-US"/>
           </a:p>
@@ -1440,7 +1440,7 @@
           <a:p>
             <a:fld id="{854E60CA-E60B-3C4A-A6C2-C45FCFAB7068}" type="datetimeFigureOut">
               <a:rPr lang="en-US" smtClean="0"/>
-              <a:t>4/14/2026</a:t>
+              <a:t>4/17/2026</a:t>
             </a:fld>
             <a:endParaRPr lang="en-US"/>
           </a:p>
@@ -1852,7 +1852,7 @@
           <a:p>
             <a:fld id="{854E60CA-E60B-3C4A-A6C2-C45FCFAB7068}" type="datetimeFigureOut">
               <a:rPr lang="en-US" smtClean="0"/>
-              <a:t>4/14/2026</a:t>
+              <a:t>4/17/2026</a:t>
             </a:fld>
             <a:endParaRPr lang="en-US"/>
           </a:p>
@@ -1993,7 +1993,7 @@
           <a:p>
             <a:fld id="{854E60CA-E60B-3C4A-A6C2-C45FCFAB7068}" type="datetimeFigureOut">
               <a:rPr lang="en-US" smtClean="0"/>
-              <a:t>4/14/2026</a:t>
+              <a:t>4/17/2026</a:t>
             </a:fld>
             <a:endParaRPr lang="en-US"/>
           </a:p>
@@ -2106,7 +2106,7 @@
           <a:p>
             <a:fld id="{854E60CA-E60B-3C4A-A6C2-C45FCFAB7068}" type="datetimeFigureOut">
               <a:rPr lang="en-US" smtClean="0"/>
-              <a:t>4/14/2026</a:t>
+              <a:t>4/17/2026</a:t>
             </a:fld>
             <a:endParaRPr lang="en-US"/>
           </a:p>
@@ -2417,7 +2417,7 @@
           <a:p>
             <a:fld id="{854E60CA-E60B-3C4A-A6C2-C45FCFAB7068}" type="datetimeFigureOut">
               <a:rPr lang="en-US" smtClean="0"/>
-              <a:t>4/14/2026</a:t>
+              <a:t>4/17/2026</a:t>
             </a:fld>
             <a:endParaRPr lang="en-US"/>
           </a:p>
@@ -2705,7 +2705,7 @@
           <a:p>
             <a:fld id="{854E60CA-E60B-3C4A-A6C2-C45FCFAB7068}" type="datetimeFigureOut">
               <a:rPr lang="en-US" smtClean="0"/>
-              <a:t>4/14/2026</a:t>
+              <a:t>4/17/2026</a:t>
             </a:fld>
             <a:endParaRPr lang="en-US"/>
           </a:p>
@@ -2946,7 +2946,7 @@
           <a:p>
             <a:fld id="{854E60CA-E60B-3C4A-A6C2-C45FCFAB7068}" type="datetimeFigureOut">
               <a:rPr lang="en-US" smtClean="0"/>
-              <a:t>4/14/2026</a:t>
+              <a:t>4/17/2026</a:t>
             </a:fld>
             <a:endParaRPr lang="en-US"/>
           </a:p>
@@ -3468,7 +3468,7 @@
           <p:nvPr>
             <p:extLst>
               <p:ext uri="{D42A27DB-BD31-4B8C-83A1-F6EECF244321}">
-                <p14:modId xmlns:p14="http://schemas.microsoft.com/office/powerpoint/2010/main" val="3323168285"/>
+                <p14:modId xmlns:p14="http://schemas.microsoft.com/office/powerpoint/2010/main" val="3533126324"/>
               </p:ext>
             </p:extLst>
           </p:nvPr>
@@ -3593,10 +3593,7 @@
                     <a:bodyPr/>
                     <a:lstStyle/>
                     <a:p>
-                      <a:r>
-                        <a:rPr lang="en-US" sz="2400" dirty="0"/>
-                        <a:t>0.4</a:t>
-                      </a:r>
+                      <a:endParaRPr lang="en-US" sz="2400" dirty="0"/>
                     </a:p>
                   </a:txBody>
                   <a:tcPr/>
@@ -3606,10 +3603,7 @@
                     <a:bodyPr/>
                     <a:lstStyle/>
                     <a:p>
-                      <a:r>
-                        <a:rPr lang="en-US" sz="2400" dirty="0"/>
-                        <a:t>2</a:t>
-                      </a:r>
+                      <a:endParaRPr lang="en-US" sz="2400" dirty="0"/>
                     </a:p>
                   </a:txBody>
                   <a:tcPr/>
